--- a/lectures/02/Lecture02.pptx
+++ b/lectures/02/Lecture02.pptx
@@ -1957,7 +1957,7 @@
           <a:lstStyle/>
           <a:p>
             <a:fld id="{4C0787A1-AE21-7749-8ABB-48F5E74FF1F8}" type="datetimeFigureOut">
-              <a:t>9/8/26</a:t>
+              <a:t>9/9/26</a:t>
             </a:fld>
             <a:endParaRPr/>
           </a:p>
@@ -2152,7 +2152,7 @@
           <a:lstStyle/>
           <a:p>
             <a:fld id="{4C0787A1-AE21-7749-8ABB-48F5E74FF1F8}" type="datetimeFigureOut">
-              <a:t>9/8/26</a:t>
+              <a:t>9/9/26</a:t>
             </a:fld>
             <a:endParaRPr/>
           </a:p>
@@ -2357,7 +2357,7 @@
           <a:lstStyle/>
           <a:p>
             <a:fld id="{4C0787A1-AE21-7749-8ABB-48F5E74FF1F8}" type="datetimeFigureOut">
-              <a:t>9/8/26</a:t>
+              <a:t>9/9/26</a:t>
             </a:fld>
             <a:endParaRPr/>
           </a:p>
@@ -2552,7 +2552,7 @@
           <a:lstStyle/>
           <a:p>
             <a:fld id="{4C0787A1-AE21-7749-8ABB-48F5E74FF1F8}" type="datetimeFigureOut">
-              <a:t>9/8/26</a:t>
+              <a:t>9/9/26</a:t>
             </a:fld>
             <a:endParaRPr/>
           </a:p>
@@ -2821,7 +2821,7 @@
           <a:lstStyle/>
           <a:p>
             <a:fld id="{4C0787A1-AE21-7749-8ABB-48F5E74FF1F8}" type="datetimeFigureOut">
-              <a:t>9/8/26</a:t>
+              <a:t>9/9/26</a:t>
             </a:fld>
             <a:endParaRPr/>
           </a:p>
@@ -3088,7 +3088,7 @@
           <a:lstStyle/>
           <a:p>
             <a:fld id="{4C0787A1-AE21-7749-8ABB-48F5E74FF1F8}" type="datetimeFigureOut">
-              <a:t>9/8/26</a:t>
+              <a:t>9/9/26</a:t>
             </a:fld>
             <a:endParaRPr/>
           </a:p>
@@ -3504,7 +3504,7 @@
           <a:lstStyle/>
           <a:p>
             <a:fld id="{4C0787A1-AE21-7749-8ABB-48F5E74FF1F8}" type="datetimeFigureOut">
-              <a:t>9/8/26</a:t>
+              <a:t>9/9/26</a:t>
             </a:fld>
             <a:endParaRPr/>
           </a:p>
@@ -3637,7 +3637,7 @@
           <a:lstStyle/>
           <a:p>
             <a:fld id="{4C0787A1-AE21-7749-8ABB-48F5E74FF1F8}" type="datetimeFigureOut">
-              <a:t>9/8/26</a:t>
+              <a:t>9/9/26</a:t>
             </a:fld>
             <a:endParaRPr/>
           </a:p>
@@ -3743,7 +3743,7 @@
           <a:lstStyle/>
           <a:p>
             <a:fld id="{4C0787A1-AE21-7749-8ABB-48F5E74FF1F8}" type="datetimeFigureOut">
-              <a:t>9/8/26</a:t>
+              <a:t>9/9/26</a:t>
             </a:fld>
             <a:endParaRPr/>
           </a:p>
@@ -4062,7 +4062,7 @@
           <a:lstStyle/>
           <a:p>
             <a:fld id="{4C0787A1-AE21-7749-8ABB-48F5E74FF1F8}" type="datetimeFigureOut">
-              <a:t>9/8/26</a:t>
+              <a:t>9/9/26</a:t>
             </a:fld>
             <a:endParaRPr/>
           </a:p>
@@ -4344,7 +4344,7 @@
           <a:lstStyle/>
           <a:p>
             <a:fld id="{4C0787A1-AE21-7749-8ABB-48F5E74FF1F8}" type="datetimeFigureOut">
-              <a:t>9/8/26</a:t>
+              <a:t>9/9/26</a:t>
             </a:fld>
             <a:endParaRPr/>
           </a:p>
@@ -4583,7 +4583,7 @@
           </a:lstStyle>
           <a:p>
             <a:fld id="{4C0787A1-AE21-7749-8ABB-48F5E74FF1F8}" type="datetimeFigureOut">
-              <a:t>9/8/26</a:t>
+              <a:t>9/9/26</a:t>
             </a:fld>
             <a:endParaRPr/>
           </a:p>
@@ -6334,7 +6334,7 @@
         <p:spPr>
           <a:xfrm>
             <a:off x="876299" y="1285875"/>
-            <a:ext cx="10260403" cy="3018706"/>
+            <a:ext cx="10628129" cy="3018706"/>
           </a:xfrm>
           <a:prstGeom prst="roundRect">
             <a:avLst>
@@ -11844,8 +11844,8 @@
         </p:nvSpPr>
         <p:spPr>
           <a:xfrm>
-            <a:off x="876300" y="1238250"/>
-            <a:ext cx="5524500" cy="4000500"/>
+            <a:off x="838201" y="1085850"/>
+            <a:ext cx="5668925" cy="1075660"/>
           </a:xfrm>
           <a:prstGeom prst="roundRect">
             <a:avLst>
@@ -11878,15 +11878,48 @@
               </a:defRPr>
             </a:pPr>
             <a:r>
-              <a:rPr sz="1500">
-                <a:solidFill>
-                  <a:srgbClr val="17242B"/>
-                </a:solidFill>
-                <a:latin typeface="Courier New"/>
-                <a:ea typeface="Courier New"/>
-                <a:cs typeface="Courier New"/>
-              </a:rPr>
-              <a:t>gzip -t data/fastq/HG002.chr20.fastq.gz</a:t>
+              <a:rPr sz="1500" dirty="0" err="1">
+                <a:solidFill>
+                  <a:srgbClr val="17242B"/>
+                </a:solidFill>
+                <a:latin typeface="Courier New"/>
+                <a:ea typeface="Courier New"/>
+                <a:cs typeface="Courier New"/>
+              </a:rPr>
+              <a:t>gzip</a:t>
+            </a:r>
+            <a:r>
+              <a:rPr sz="1500" dirty="0">
+                <a:solidFill>
+                  <a:srgbClr val="17242B"/>
+                </a:solidFill>
+                <a:latin typeface="Courier New"/>
+                <a:ea typeface="Courier New"/>
+                <a:cs typeface="Courier New"/>
+              </a:rPr>
+              <a:t> -t data/</a:t>
+            </a:r>
+            <a:r>
+              <a:rPr sz="1500" dirty="0" err="1">
+                <a:solidFill>
+                  <a:srgbClr val="17242B"/>
+                </a:solidFill>
+                <a:latin typeface="Courier New"/>
+                <a:ea typeface="Courier New"/>
+                <a:cs typeface="Courier New"/>
+              </a:rPr>
+              <a:t>fastq</a:t>
+            </a:r>
+            <a:r>
+              <a:rPr sz="1500" dirty="0">
+                <a:solidFill>
+                  <a:srgbClr val="17242B"/>
+                </a:solidFill>
+                <a:latin typeface="Courier New"/>
+                <a:ea typeface="Courier New"/>
+                <a:cs typeface="Courier New"/>
+              </a:rPr>
+              <a:t>/HG002.chr20.fastq.gz</a:t>
             </a:r>
           </a:p>
           <a:p>
@@ -11902,7 +11935,7 @@
               </a:defRPr>
             </a:pPr>
             <a:r>
-              <a:rPr sz="1500">
+              <a:rPr sz="1500" dirty="0">
                 <a:solidFill>
                   <a:srgbClr val="17242B"/>
                 </a:solidFill>
@@ -11926,7 +11959,7 @@
               </a:defRPr>
             </a:pPr>
             <a:r>
-              <a:rPr sz="1500">
+              <a:rPr sz="1500" dirty="0">
                 <a:solidFill>
                   <a:srgbClr val="17242B"/>
                 </a:solidFill>
@@ -11950,7 +11983,7 @@
               </a:defRPr>
             </a:pPr>
             <a:r>
-              <a:rPr sz="1500">
+              <a:rPr sz="1500" dirty="0">
                 <a:solidFill>
                   <a:srgbClr val="17242B"/>
                 </a:solidFill>
@@ -11963,498 +11996,36 @@
           </a:p>
         </p:txBody>
       </p:sp>
-      <p:sp>
-        <p:nvSpPr>
-          <p:cNvPr id="4" name="Accent 1">
+      <p:pic>
+        <p:nvPicPr>
+          <p:cNvPr id="16" name="Picture 15">
             <a:extLst>
               <a:ext uri="{FF2B5EF4-FFF2-40B4-BE49-F238E27FC236}">
-                <a16:creationId xmlns:a16="http://schemas.microsoft.com/office/drawing/2014/main" id="{F95D8DD7-2849-4603-B9ED-40F48F15CDE6}"/>
+                <a16:creationId xmlns:a16="http://schemas.microsoft.com/office/drawing/2014/main" id="{0A75364D-D82B-0B47-01E6-7F43991E6BB8}"/>
               </a:ext>
             </a:extLst>
           </p:cNvPr>
-          <p:cNvSpPr>
-            <a:spLocks noGrp="1"/>
-          </p:cNvSpPr>
+          <p:cNvPicPr>
+            <a:picLocks noChangeAspect="1"/>
+          </p:cNvPicPr>
           <p:nvPr/>
-        </p:nvSpPr>
+        </p:nvPicPr>
+        <p:blipFill>
+          <a:blip r:embed="rId3"/>
+          <a:stretch>
+            <a:fillRect/>
+          </a:stretch>
+        </p:blipFill>
         <p:spPr>
           <a:xfrm>
-            <a:off x="6905625" y="1419225"/>
-            <a:ext cx="66675" cy="495300"/>
+            <a:off x="7569081" y="361950"/>
+            <a:ext cx="3535850" cy="6354282"/>
           </a:xfrm>
           <a:prstGeom prst="rect">
             <a:avLst/>
           </a:prstGeom>
-          <a:solidFill>
-            <a:srgbClr val="0F84AA"/>
-          </a:solidFill>
-          <a:ln w="0">
-            <a:noFill/>
-            <a:prstDash val="solid"/>
-          </a:ln>
         </p:spPr>
-        <p:txBody>
-          <a:bodyPr/>
-          <a:lstStyle/>
-          <a:p>
-            <a:endParaRPr/>
-          </a:p>
-        </p:txBody>
-      </p:sp>
-      <p:sp>
-        <p:nvSpPr>
-          <p:cNvPr id="5" name="Point 1">
-            <a:extLst>
-              <a:ext uri="{FF2B5EF4-FFF2-40B4-BE49-F238E27FC236}">
-                <a16:creationId xmlns:a16="http://schemas.microsoft.com/office/drawing/2014/main" id="{CDBD869C-D6ED-4960-BFBF-7B5BCC4F4D7E}"/>
-              </a:ext>
-            </a:extLst>
-          </p:cNvPr>
-          <p:cNvSpPr>
-            <a:spLocks noGrp="1"/>
-          </p:cNvSpPr>
-          <p:nvPr/>
-        </p:nvSpPr>
-        <p:spPr>
-          <a:xfrm>
-            <a:off x="7134225" y="1381125"/>
-            <a:ext cx="4057650" cy="638175"/>
-          </a:xfrm>
-          <a:prstGeom prst="rect">
-            <a:avLst/>
-          </a:prstGeom>
-          <a:noFill/>
-          <a:ln w="0">
-            <a:noFill/>
-            <a:prstDash val="solid"/>
-          </a:ln>
-        </p:spPr>
-        <p:txBody>
-          <a:bodyPr/>
-          <a:lstStyle/>
-          <a:p>
-            <a:pPr>
-              <a:buNone/>
-              <a:defRPr sz="1425">
-                <a:solidFill>
-                  <a:srgbClr val="202A33"/>
-                </a:solidFill>
-                <a:latin typeface="Arial"/>
-                <a:ea typeface="Arial"/>
-                <a:cs typeface="Arial"/>
-              </a:defRPr>
-            </a:pPr>
-            <a:r>
-              <a:rPr sz="1425">
-                <a:solidFill>
-                  <a:srgbClr val="202A33"/>
-                </a:solidFill>
-                <a:latin typeface="Arial"/>
-                <a:ea typeface="Arial"/>
-                <a:cs typeface="Arial"/>
-              </a:rPr>
-              <a:t>FASTQ nén hợp lệ.</a:t>
-            </a:r>
-          </a:p>
-        </p:txBody>
-      </p:sp>
-      <p:sp>
-        <p:nvSpPr>
-          <p:cNvPr id="6" name="Accent 2">
-            <a:extLst>
-              <a:ext uri="{FF2B5EF4-FFF2-40B4-BE49-F238E27FC236}">
-                <a16:creationId xmlns:a16="http://schemas.microsoft.com/office/drawing/2014/main" id="{19EEFC44-A992-439D-9F39-E131681765FF}"/>
-              </a:ext>
-            </a:extLst>
-          </p:cNvPr>
-          <p:cNvSpPr>
-            <a:spLocks noGrp="1"/>
-          </p:cNvSpPr>
-          <p:nvPr/>
-        </p:nvSpPr>
-        <p:spPr>
-          <a:xfrm>
-            <a:off x="6905625" y="2105025"/>
-            <a:ext cx="66675" cy="495300"/>
-          </a:xfrm>
-          <a:prstGeom prst="rect">
-            <a:avLst/>
-          </a:prstGeom>
-          <a:solidFill>
-            <a:srgbClr val="E97132"/>
-          </a:solidFill>
-          <a:ln w="0">
-            <a:noFill/>
-            <a:prstDash val="solid"/>
-          </a:ln>
-        </p:spPr>
-        <p:txBody>
-          <a:bodyPr/>
-          <a:lstStyle/>
-          <a:p>
-            <a:endParaRPr/>
-          </a:p>
-        </p:txBody>
-      </p:sp>
-      <p:sp>
-        <p:nvSpPr>
-          <p:cNvPr id="7" name="Point 2">
-            <a:extLst>
-              <a:ext uri="{FF2B5EF4-FFF2-40B4-BE49-F238E27FC236}">
-                <a16:creationId xmlns:a16="http://schemas.microsoft.com/office/drawing/2014/main" id="{E15419D3-52A1-4F02-8610-9A02DF793B7F}"/>
-              </a:ext>
-            </a:extLst>
-          </p:cNvPr>
-          <p:cNvSpPr>
-            <a:spLocks noGrp="1"/>
-          </p:cNvSpPr>
-          <p:nvPr/>
-        </p:nvSpPr>
-        <p:spPr>
-          <a:xfrm>
-            <a:off x="7134225" y="2066925"/>
-            <a:ext cx="4057650" cy="638175"/>
-          </a:xfrm>
-          <a:prstGeom prst="rect">
-            <a:avLst/>
-          </a:prstGeom>
-          <a:noFill/>
-          <a:ln w="0">
-            <a:noFill/>
-            <a:prstDash val="solid"/>
-          </a:ln>
-        </p:spPr>
-        <p:txBody>
-          <a:bodyPr/>
-          <a:lstStyle/>
-          <a:p>
-            <a:pPr>
-              <a:buNone/>
-              <a:defRPr sz="1425">
-                <a:solidFill>
-                  <a:srgbClr val="202A33"/>
-                </a:solidFill>
-                <a:latin typeface="Arial"/>
-                <a:ea typeface="Arial"/>
-                <a:cs typeface="Arial"/>
-              </a:defRPr>
-            </a:pPr>
-            <a:endParaRPr/>
-          </a:p>
-        </p:txBody>
-      </p:sp>
-      <p:sp>
-        <p:nvSpPr>
-          <p:cNvPr id="8" name="Accent 3">
-            <a:extLst>
-              <a:ext uri="{FF2B5EF4-FFF2-40B4-BE49-F238E27FC236}">
-                <a16:creationId xmlns:a16="http://schemas.microsoft.com/office/drawing/2014/main" id="{1DA51AC8-F954-4EF6-80EF-37519541EC4E}"/>
-              </a:ext>
-            </a:extLst>
-          </p:cNvPr>
-          <p:cNvSpPr>
-            <a:spLocks noGrp="1"/>
-          </p:cNvSpPr>
-          <p:nvPr/>
-        </p:nvSpPr>
-        <p:spPr>
-          <a:xfrm>
-            <a:off x="6905625" y="2790825"/>
-            <a:ext cx="66675" cy="495300"/>
-          </a:xfrm>
-          <a:prstGeom prst="rect">
-            <a:avLst/>
-          </a:prstGeom>
-          <a:solidFill>
-            <a:srgbClr val="2E8B78"/>
-          </a:solidFill>
-          <a:ln w="0">
-            <a:noFill/>
-            <a:prstDash val="solid"/>
-          </a:ln>
-        </p:spPr>
-        <p:txBody>
-          <a:bodyPr/>
-          <a:lstStyle/>
-          <a:p>
-            <a:endParaRPr/>
-          </a:p>
-        </p:txBody>
-      </p:sp>
-      <p:sp>
-        <p:nvSpPr>
-          <p:cNvPr id="9" name="Point 3">
-            <a:extLst>
-              <a:ext uri="{FF2B5EF4-FFF2-40B4-BE49-F238E27FC236}">
-                <a16:creationId xmlns:a16="http://schemas.microsoft.com/office/drawing/2014/main" id="{B1371358-58F2-456F-9DD7-A3A19E3C7ABE}"/>
-              </a:ext>
-            </a:extLst>
-          </p:cNvPr>
-          <p:cNvSpPr>
-            <a:spLocks noGrp="1"/>
-          </p:cNvSpPr>
-          <p:nvPr/>
-        </p:nvSpPr>
-        <p:spPr>
-          <a:xfrm>
-            <a:off x="7134225" y="2752725"/>
-            <a:ext cx="4057650" cy="638175"/>
-          </a:xfrm>
-          <a:prstGeom prst="rect">
-            <a:avLst/>
-          </a:prstGeom>
-          <a:noFill/>
-          <a:ln w="0">
-            <a:noFill/>
-            <a:prstDash val="solid"/>
-          </a:ln>
-        </p:spPr>
-        <p:txBody>
-          <a:bodyPr/>
-          <a:lstStyle/>
-          <a:p>
-            <a:pPr>
-              <a:buNone/>
-              <a:defRPr sz="1425">
-                <a:solidFill>
-                  <a:srgbClr val="202A33"/>
-                </a:solidFill>
-                <a:latin typeface="Arial"/>
-                <a:ea typeface="Arial"/>
-                <a:cs typeface="Arial"/>
-              </a:defRPr>
-            </a:pPr>
-            <a:endParaRPr/>
-          </a:p>
-        </p:txBody>
-      </p:sp>
-      <p:sp>
-        <p:nvSpPr>
-          <p:cNvPr id="10" name="Accent 4">
-            <a:extLst>
-              <a:ext uri="{FF2B5EF4-FFF2-40B4-BE49-F238E27FC236}">
-                <a16:creationId xmlns:a16="http://schemas.microsoft.com/office/drawing/2014/main" id="{9673F61A-AD84-4A20-B624-EBAD72984C7D}"/>
-              </a:ext>
-            </a:extLst>
-          </p:cNvPr>
-          <p:cNvSpPr>
-            <a:spLocks noGrp="1"/>
-          </p:cNvSpPr>
-          <p:nvPr/>
-        </p:nvSpPr>
-        <p:spPr>
-          <a:xfrm>
-            <a:off x="6905625" y="3476625"/>
-            <a:ext cx="66675" cy="495300"/>
-          </a:xfrm>
-          <a:prstGeom prst="rect">
-            <a:avLst/>
-          </a:prstGeom>
-          <a:solidFill>
-            <a:srgbClr val="7B61A8"/>
-          </a:solidFill>
-          <a:ln w="0">
-            <a:noFill/>
-            <a:prstDash val="solid"/>
-          </a:ln>
-        </p:spPr>
-        <p:txBody>
-          <a:bodyPr/>
-          <a:lstStyle/>
-          <a:p>
-            <a:endParaRPr/>
-          </a:p>
-        </p:txBody>
-      </p:sp>
-      <p:sp>
-        <p:nvSpPr>
-          <p:cNvPr id="11" name="Point 4">
-            <a:extLst>
-              <a:ext uri="{FF2B5EF4-FFF2-40B4-BE49-F238E27FC236}">
-                <a16:creationId xmlns:a16="http://schemas.microsoft.com/office/drawing/2014/main" id="{7ABBC7B6-5C7A-4B8F-964D-CE77CDAA9510}"/>
-              </a:ext>
-            </a:extLst>
-          </p:cNvPr>
-          <p:cNvSpPr>
-            <a:spLocks noGrp="1"/>
-          </p:cNvSpPr>
-          <p:nvPr/>
-        </p:nvSpPr>
-        <p:spPr>
-          <a:xfrm>
-            <a:off x="7134225" y="3438525"/>
-            <a:ext cx="4057650" cy="638175"/>
-          </a:xfrm>
-          <a:prstGeom prst="rect">
-            <a:avLst/>
-          </a:prstGeom>
-          <a:noFill/>
-          <a:ln w="0">
-            <a:noFill/>
-            <a:prstDash val="solid"/>
-          </a:ln>
-        </p:spPr>
-        <p:txBody>
-          <a:bodyPr/>
-          <a:lstStyle/>
-          <a:p>
-            <a:pPr>
-              <a:buNone/>
-              <a:defRPr sz="1425">
-                <a:solidFill>
-                  <a:srgbClr val="202A33"/>
-                </a:solidFill>
-                <a:latin typeface="Arial"/>
-                <a:ea typeface="Arial"/>
-                <a:cs typeface="Arial"/>
-              </a:defRPr>
-            </a:pPr>
-            <a:endParaRPr/>
-          </a:p>
-        </p:txBody>
-      </p:sp>
-      <p:sp>
-        <p:nvSpPr>
-          <p:cNvPr id="12" name="Accent 5">
-            <a:extLst>
-              <a:ext uri="{FF2B5EF4-FFF2-40B4-BE49-F238E27FC236}">
-                <a16:creationId xmlns:a16="http://schemas.microsoft.com/office/drawing/2014/main" id="{F1ABC482-4F94-4BE3-A414-093B8A025450}"/>
-              </a:ext>
-            </a:extLst>
-          </p:cNvPr>
-          <p:cNvSpPr>
-            <a:spLocks noGrp="1"/>
-          </p:cNvSpPr>
-          <p:nvPr/>
-        </p:nvSpPr>
-        <p:spPr>
-          <a:xfrm>
-            <a:off x="6905625" y="4162425"/>
-            <a:ext cx="66675" cy="495300"/>
-          </a:xfrm>
-          <a:prstGeom prst="rect">
-            <a:avLst/>
-          </a:prstGeom>
-          <a:solidFill>
-            <a:srgbClr val="D49A22"/>
-          </a:solidFill>
-          <a:ln w="0">
-            <a:noFill/>
-            <a:prstDash val="solid"/>
-          </a:ln>
-        </p:spPr>
-        <p:txBody>
-          <a:bodyPr/>
-          <a:lstStyle/>
-          <a:p>
-            <a:endParaRPr/>
-          </a:p>
-        </p:txBody>
-      </p:sp>
-      <p:sp>
-        <p:nvSpPr>
-          <p:cNvPr id="13" name="Point 5">
-            <a:extLst>
-              <a:ext uri="{FF2B5EF4-FFF2-40B4-BE49-F238E27FC236}">
-                <a16:creationId xmlns:a16="http://schemas.microsoft.com/office/drawing/2014/main" id="{ED50CD46-7A0C-4C1A-8D20-3919F8F9BA9F}"/>
-              </a:ext>
-            </a:extLst>
-          </p:cNvPr>
-          <p:cNvSpPr>
-            <a:spLocks noGrp="1"/>
-          </p:cNvSpPr>
-          <p:nvPr/>
-        </p:nvSpPr>
-        <p:spPr>
-          <a:xfrm>
-            <a:off x="7134225" y="4124325"/>
-            <a:ext cx="4057650" cy="638175"/>
-          </a:xfrm>
-          <a:prstGeom prst="rect">
-            <a:avLst/>
-          </a:prstGeom>
-          <a:noFill/>
-          <a:ln w="0">
-            <a:noFill/>
-            <a:prstDash val="solid"/>
-          </a:ln>
-        </p:spPr>
-        <p:txBody>
-          <a:bodyPr/>
-          <a:lstStyle/>
-          <a:p>
-            <a:pPr>
-              <a:buNone/>
-              <a:defRPr sz="1425">
-                <a:solidFill>
-                  <a:srgbClr val="202A33"/>
-                </a:solidFill>
-                <a:latin typeface="Arial"/>
-                <a:ea typeface="Arial"/>
-                <a:cs typeface="Arial"/>
-              </a:defRPr>
-            </a:pPr>
-            <a:endParaRPr/>
-          </a:p>
-        </p:txBody>
-      </p:sp>
-      <p:sp>
-        <p:nvSpPr>
-          <p:cNvPr id="14" name="Goal">
-            <a:extLst>
-              <a:ext uri="{FF2B5EF4-FFF2-40B4-BE49-F238E27FC236}">
-                <a16:creationId xmlns:a16="http://schemas.microsoft.com/office/drawing/2014/main" id="{7B02453A-5E39-4E3F-BDE9-1B6FB955C483}"/>
-              </a:ext>
-            </a:extLst>
-          </p:cNvPr>
-          <p:cNvSpPr>
-            <a:spLocks noGrp="1"/>
-          </p:cNvSpPr>
-          <p:nvPr/>
-        </p:nvSpPr>
-        <p:spPr>
-          <a:xfrm>
-            <a:off x="876300" y="5572125"/>
-            <a:ext cx="10287000" cy="400050"/>
-          </a:xfrm>
-          <a:prstGeom prst="rect">
-            <a:avLst/>
-          </a:prstGeom>
-          <a:noFill/>
-          <a:ln w="0">
-            <a:noFill/>
-            <a:prstDash val="solid"/>
-          </a:ln>
-        </p:spPr>
-        <p:txBody>
-          <a:bodyPr/>
-          <a:lstStyle/>
-          <a:p>
-            <a:pPr>
-              <a:buNone/>
-              <a:defRPr sz="1425" b="1">
-                <a:solidFill>
-                  <a:srgbClr val="0F84AA"/>
-                </a:solidFill>
-                <a:latin typeface="Arial"/>
-                <a:ea typeface="Arial"/>
-                <a:cs typeface="Arial"/>
-              </a:defRPr>
-            </a:pPr>
-            <a:r>
-              <a:rPr sz="1425" b="1">
-                <a:solidFill>
-                  <a:srgbClr val="0F84AA"/>
-                </a:solidFill>
-                <a:latin typeface="Arial"/>
-                <a:ea typeface="Arial"/>
-                <a:cs typeface="Arial"/>
-              </a:rPr>
-              <a:t>Đầu ra: FASTQ + BED + reference sẵn sàng cho QC.</a:t>
-            </a:r>
-          </a:p>
-        </p:txBody>
-      </p:sp>
+      </p:pic>
     </p:spTree>
     <p:extLst>
       <p:ext uri="{BB962C8B-B14F-4D97-AF65-F5344CB8AC3E}">
@@ -13703,6 +13274,661 @@
           <a:lstStyle/>
           <a:p>
             <a:endParaRPr/>
+          </a:p>
+        </p:txBody>
+      </p:sp>
+      <p:sp>
+        <p:nvSpPr>
+          <p:cNvPr id="3" name="TextBox 2">
+            <a:extLst>
+              <a:ext uri="{FF2B5EF4-FFF2-40B4-BE49-F238E27FC236}">
+                <a16:creationId xmlns:a16="http://schemas.microsoft.com/office/drawing/2014/main" id="{51EE7A10-68F3-DD33-D4A8-9D5859C91D23}"/>
+              </a:ext>
+            </a:extLst>
+          </p:cNvPr>
+          <p:cNvSpPr txBox="1"/>
+          <p:nvPr/>
+        </p:nvSpPr>
+        <p:spPr>
+          <a:xfrm>
+            <a:off x="1020726" y="1541721"/>
+            <a:ext cx="10515601" cy="2459006"/>
+          </a:xfrm>
+          <a:prstGeom prst="rect">
+            <a:avLst/>
+          </a:prstGeom>
+          <a:noFill/>
+        </p:spPr>
+        <p:txBody>
+          <a:bodyPr wrap="square" rtlCol="0">
+            <a:spAutoFit/>
+          </a:bodyPr>
+          <a:lstStyle/>
+          <a:p>
+            <a:pPr marL="457200" indent="-457200">
+              <a:lnSpc>
+                <a:spcPct val="200000"/>
+              </a:lnSpc>
+              <a:buFont typeface="+mj-lt"/>
+              <a:buAutoNum type="arabicPeriod"/>
+            </a:pPr>
+            <a:r>
+              <a:rPr lang="en-US" sz="2000" dirty="0" err="1">
+                <a:solidFill>
+                  <a:srgbClr val="17242B"/>
+                </a:solidFill>
+                <a:latin typeface="Arial" panose="020B0604020202020204" pitchFamily="34" charset="0"/>
+                <a:ea typeface="Courier New"/>
+                <a:cs typeface="Arial" panose="020B0604020202020204" pitchFamily="34" charset="0"/>
+              </a:rPr>
+              <a:t>Thực</a:t>
+            </a:r>
+            <a:r>
+              <a:rPr lang="en-US" sz="2000" dirty="0">
+                <a:solidFill>
+                  <a:srgbClr val="17242B"/>
+                </a:solidFill>
+                <a:latin typeface="Arial" panose="020B0604020202020204" pitchFamily="34" charset="0"/>
+                <a:ea typeface="Courier New"/>
+                <a:cs typeface="Arial" panose="020B0604020202020204" pitchFamily="34" charset="0"/>
+              </a:rPr>
+              <a:t> </a:t>
+            </a:r>
+            <a:r>
+              <a:rPr lang="en-US" sz="2000" dirty="0" err="1">
+                <a:solidFill>
+                  <a:srgbClr val="17242B"/>
+                </a:solidFill>
+                <a:latin typeface="Arial" panose="020B0604020202020204" pitchFamily="34" charset="0"/>
+                <a:ea typeface="Courier New"/>
+                <a:cs typeface="Arial" panose="020B0604020202020204" pitchFamily="34" charset="0"/>
+              </a:rPr>
+              <a:t>hành</a:t>
+            </a:r>
+            <a:r>
+              <a:rPr lang="en-US" sz="2000" dirty="0">
+                <a:solidFill>
+                  <a:srgbClr val="17242B"/>
+                </a:solidFill>
+                <a:latin typeface="Arial" panose="020B0604020202020204" pitchFamily="34" charset="0"/>
+                <a:ea typeface="Courier New"/>
+                <a:cs typeface="Arial" panose="020B0604020202020204" pitchFamily="34" charset="0"/>
+              </a:rPr>
+              <a:t> Dorado </a:t>
+            </a:r>
+            <a:r>
+              <a:rPr lang="en-US" sz="2000" dirty="0" err="1">
+                <a:solidFill>
+                  <a:srgbClr val="17242B"/>
+                </a:solidFill>
+                <a:latin typeface="Arial" panose="020B0604020202020204" pitchFamily="34" charset="0"/>
+                <a:ea typeface="Courier New"/>
+                <a:cs typeface="Arial" panose="020B0604020202020204" pitchFamily="34" charset="0"/>
+              </a:rPr>
+              <a:t>basecaller</a:t>
+            </a:r>
+            <a:r>
+              <a:rPr lang="en-US" sz="2000" dirty="0">
+                <a:solidFill>
+                  <a:srgbClr val="17242B"/>
+                </a:solidFill>
+                <a:latin typeface="Arial" panose="020B0604020202020204" pitchFamily="34" charset="0"/>
+                <a:ea typeface="Courier New"/>
+                <a:cs typeface="Arial" panose="020B0604020202020204" pitchFamily="34" charset="0"/>
+              </a:rPr>
+              <a:t> </a:t>
+            </a:r>
+            <a:r>
+              <a:rPr lang="en-US" sz="2000" dirty="0" err="1">
+                <a:solidFill>
+                  <a:srgbClr val="17242B"/>
+                </a:solidFill>
+                <a:latin typeface="Arial" panose="020B0604020202020204" pitchFamily="34" charset="0"/>
+                <a:ea typeface="Courier New"/>
+                <a:cs typeface="Arial" panose="020B0604020202020204" pitchFamily="34" charset="0"/>
+              </a:rPr>
+              <a:t>với</a:t>
+            </a:r>
+            <a:r>
+              <a:rPr lang="en-US" sz="2000" dirty="0">
+                <a:solidFill>
+                  <a:srgbClr val="17242B"/>
+                </a:solidFill>
+                <a:latin typeface="Arial" panose="020B0604020202020204" pitchFamily="34" charset="0"/>
+                <a:ea typeface="Courier New"/>
+                <a:cs typeface="Arial" panose="020B0604020202020204" pitchFamily="34" charset="0"/>
+              </a:rPr>
+              <a:t> “fast” “hac” </a:t>
+            </a:r>
+            <a:r>
+              <a:rPr lang="en-US" sz="2000" dirty="0" err="1">
+                <a:solidFill>
+                  <a:srgbClr val="17242B"/>
+                </a:solidFill>
+                <a:latin typeface="Arial" panose="020B0604020202020204" pitchFamily="34" charset="0"/>
+                <a:ea typeface="Courier New"/>
+                <a:cs typeface="Arial" panose="020B0604020202020204" pitchFamily="34" charset="0"/>
+              </a:rPr>
+              <a:t>và</a:t>
+            </a:r>
+            <a:r>
+              <a:rPr lang="en-US" sz="2000" dirty="0">
+                <a:solidFill>
+                  <a:srgbClr val="17242B"/>
+                </a:solidFill>
+                <a:latin typeface="Arial" panose="020B0604020202020204" pitchFamily="34" charset="0"/>
+                <a:ea typeface="Courier New"/>
+                <a:cs typeface="Arial" panose="020B0604020202020204" pitchFamily="34" charset="0"/>
+              </a:rPr>
+              <a:t> “sup” </a:t>
+            </a:r>
+            <a:r>
+              <a:rPr lang="en-US" sz="2000" dirty="0" err="1">
+                <a:solidFill>
+                  <a:srgbClr val="17242B"/>
+                </a:solidFill>
+                <a:latin typeface="Arial" panose="020B0604020202020204" pitchFamily="34" charset="0"/>
+                <a:ea typeface="Courier New"/>
+                <a:cs typeface="Arial" panose="020B0604020202020204" pitchFamily="34" charset="0"/>
+              </a:rPr>
+              <a:t>và</a:t>
+            </a:r>
+            <a:r>
+              <a:rPr lang="en-US" sz="2000" dirty="0">
+                <a:solidFill>
+                  <a:srgbClr val="17242B"/>
+                </a:solidFill>
+                <a:latin typeface="Arial" panose="020B0604020202020204" pitchFamily="34" charset="0"/>
+                <a:ea typeface="Courier New"/>
+                <a:cs typeface="Arial" panose="020B0604020202020204" pitchFamily="34" charset="0"/>
+              </a:rPr>
+              <a:t> </a:t>
+            </a:r>
+            <a:r>
+              <a:rPr lang="en-US" sz="2000" dirty="0">
+                <a:solidFill>
+                  <a:srgbClr val="17242B"/>
+                </a:solidFill>
+                <a:latin typeface="Arial" panose="020B0604020202020204" pitchFamily="34" charset="0"/>
+                <a:cs typeface="Arial" panose="020B0604020202020204" pitchFamily="34" charset="0"/>
+              </a:rPr>
+              <a:t>so </a:t>
+            </a:r>
+            <a:r>
+              <a:rPr lang="en-US" sz="2000" dirty="0" err="1">
+                <a:solidFill>
+                  <a:srgbClr val="17242B"/>
+                </a:solidFill>
+                <a:latin typeface="Arial" panose="020B0604020202020204" pitchFamily="34" charset="0"/>
+                <a:cs typeface="Arial" panose="020B0604020202020204" pitchFamily="34" charset="0"/>
+              </a:rPr>
+              <a:t>sánh</a:t>
+            </a:r>
+            <a:r>
+              <a:rPr lang="en-US" sz="2000" dirty="0">
+                <a:solidFill>
+                  <a:srgbClr val="17242B"/>
+                </a:solidFill>
+                <a:latin typeface="Arial" panose="020B0604020202020204" pitchFamily="34" charset="0"/>
+                <a:cs typeface="Arial" panose="020B0604020202020204" pitchFamily="34" charset="0"/>
+              </a:rPr>
+              <a:t> </a:t>
+            </a:r>
+            <a:r>
+              <a:rPr lang="en-US" sz="2000" dirty="0" err="1">
+                <a:solidFill>
+                  <a:srgbClr val="17242B"/>
+                </a:solidFill>
+                <a:latin typeface="Arial" panose="020B0604020202020204" pitchFamily="34" charset="0"/>
+                <a:cs typeface="Arial" panose="020B0604020202020204" pitchFamily="34" charset="0"/>
+              </a:rPr>
+              <a:t>kết</a:t>
+            </a:r>
+            <a:r>
+              <a:rPr lang="en-US" sz="2000" dirty="0">
+                <a:solidFill>
+                  <a:srgbClr val="17242B"/>
+                </a:solidFill>
+                <a:latin typeface="Arial" panose="020B0604020202020204" pitchFamily="34" charset="0"/>
+                <a:cs typeface="Arial" panose="020B0604020202020204" pitchFamily="34" charset="0"/>
+              </a:rPr>
+              <a:t> </a:t>
+            </a:r>
+            <a:r>
+              <a:rPr lang="en-US" sz="2000" dirty="0" err="1">
+                <a:solidFill>
+                  <a:srgbClr val="17242B"/>
+                </a:solidFill>
+                <a:latin typeface="Arial" panose="020B0604020202020204" pitchFamily="34" charset="0"/>
+                <a:cs typeface="Arial" panose="020B0604020202020204" pitchFamily="34" charset="0"/>
+              </a:rPr>
+              <a:t>quả</a:t>
+            </a:r>
+            <a:r>
+              <a:rPr lang="en-US" sz="2000" dirty="0">
+                <a:solidFill>
+                  <a:srgbClr val="17242B"/>
+                </a:solidFill>
+                <a:latin typeface="Arial" panose="020B0604020202020204" pitchFamily="34" charset="0"/>
+                <a:cs typeface="Arial" panose="020B0604020202020204" pitchFamily="34" charset="0"/>
+              </a:rPr>
+              <a:t>.</a:t>
+            </a:r>
+          </a:p>
+          <a:p>
+            <a:pPr marL="457200" indent="-457200">
+              <a:lnSpc>
+                <a:spcPct val="200000"/>
+              </a:lnSpc>
+              <a:buFont typeface="+mj-lt"/>
+              <a:buAutoNum type="arabicPeriod"/>
+            </a:pPr>
+            <a:r>
+              <a:rPr lang="en-US" sz="2000" dirty="0" err="1">
+                <a:solidFill>
+                  <a:srgbClr val="17242B"/>
+                </a:solidFill>
+                <a:latin typeface="Arial" panose="020B0604020202020204" pitchFamily="34" charset="0"/>
+                <a:cs typeface="Arial" panose="020B0604020202020204" pitchFamily="34" charset="0"/>
+              </a:rPr>
+              <a:t>Phân</a:t>
+            </a:r>
+            <a:r>
+              <a:rPr lang="en-US" sz="2000" dirty="0">
+                <a:solidFill>
+                  <a:srgbClr val="17242B"/>
+                </a:solidFill>
+                <a:latin typeface="Arial" panose="020B0604020202020204" pitchFamily="34" charset="0"/>
+                <a:cs typeface="Arial" panose="020B0604020202020204" pitchFamily="34" charset="0"/>
+              </a:rPr>
+              <a:t> </a:t>
+            </a:r>
+            <a:r>
+              <a:rPr lang="en-US" sz="2000" dirty="0" err="1">
+                <a:solidFill>
+                  <a:srgbClr val="17242B"/>
+                </a:solidFill>
+                <a:latin typeface="Arial" panose="020B0604020202020204" pitchFamily="34" charset="0"/>
+                <a:cs typeface="Arial" panose="020B0604020202020204" pitchFamily="34" charset="0"/>
+              </a:rPr>
+              <a:t>biệt</a:t>
+            </a:r>
+            <a:r>
+              <a:rPr lang="en-US" sz="2000" dirty="0">
+                <a:solidFill>
+                  <a:srgbClr val="17242B"/>
+                </a:solidFill>
+                <a:latin typeface="Arial" panose="020B0604020202020204" pitchFamily="34" charset="0"/>
+                <a:cs typeface="Arial" panose="020B0604020202020204" pitchFamily="34" charset="0"/>
+              </a:rPr>
+              <a:t> </a:t>
+            </a:r>
+            <a:r>
+              <a:rPr lang="en-US" sz="2000" dirty="0" err="1">
+                <a:solidFill>
+                  <a:srgbClr val="17242B"/>
+                </a:solidFill>
+                <a:latin typeface="Arial" panose="020B0604020202020204" pitchFamily="34" charset="0"/>
+                <a:cs typeface="Arial" panose="020B0604020202020204" pitchFamily="34" charset="0"/>
+              </a:rPr>
+              <a:t>đường</a:t>
+            </a:r>
+            <a:r>
+              <a:rPr lang="en-US" sz="2000" dirty="0">
+                <a:solidFill>
+                  <a:srgbClr val="17242B"/>
+                </a:solidFill>
+                <a:latin typeface="Arial" panose="020B0604020202020204" pitchFamily="34" charset="0"/>
+                <a:cs typeface="Arial" panose="020B0604020202020204" pitchFamily="34" charset="0"/>
+              </a:rPr>
+              <a:t> </a:t>
+            </a:r>
+            <a:r>
+              <a:rPr lang="en-US" sz="2000" dirty="0" err="1">
+                <a:solidFill>
+                  <a:srgbClr val="17242B"/>
+                </a:solidFill>
+                <a:latin typeface="Arial" panose="020B0604020202020204" pitchFamily="34" charset="0"/>
+                <a:cs typeface="Arial" panose="020B0604020202020204" pitchFamily="34" charset="0"/>
+              </a:rPr>
+              <a:t>dẫn</a:t>
+            </a:r>
+            <a:r>
+              <a:rPr lang="en-US" sz="2000" dirty="0">
+                <a:solidFill>
+                  <a:srgbClr val="17242B"/>
+                </a:solidFill>
+                <a:latin typeface="Arial" panose="020B0604020202020204" pitchFamily="34" charset="0"/>
+                <a:cs typeface="Arial" panose="020B0604020202020204" pitchFamily="34" charset="0"/>
+              </a:rPr>
+              <a:t> </a:t>
+            </a:r>
+            <a:r>
+              <a:rPr lang="en-US" sz="2000" dirty="0" err="1">
+                <a:solidFill>
+                  <a:srgbClr val="17242B"/>
+                </a:solidFill>
+                <a:latin typeface="Arial" panose="020B0604020202020204" pitchFamily="34" charset="0"/>
+                <a:cs typeface="Arial" panose="020B0604020202020204" pitchFamily="34" charset="0"/>
+              </a:rPr>
+              <a:t>tương</a:t>
+            </a:r>
+            <a:r>
+              <a:rPr lang="en-US" sz="2000" dirty="0">
+                <a:solidFill>
+                  <a:srgbClr val="17242B"/>
+                </a:solidFill>
+                <a:latin typeface="Arial" panose="020B0604020202020204" pitchFamily="34" charset="0"/>
+                <a:cs typeface="Arial" panose="020B0604020202020204" pitchFamily="34" charset="0"/>
+              </a:rPr>
+              <a:t> </a:t>
+            </a:r>
+            <a:r>
+              <a:rPr lang="en-US" sz="2000" dirty="0" err="1">
+                <a:solidFill>
+                  <a:srgbClr val="17242B"/>
+                </a:solidFill>
+                <a:latin typeface="Arial" panose="020B0604020202020204" pitchFamily="34" charset="0"/>
+                <a:cs typeface="Arial" panose="020B0604020202020204" pitchFamily="34" charset="0"/>
+              </a:rPr>
+              <a:t>đối</a:t>
+            </a:r>
+            <a:r>
+              <a:rPr lang="en-US" sz="2000" dirty="0">
+                <a:solidFill>
+                  <a:srgbClr val="17242B"/>
+                </a:solidFill>
+                <a:latin typeface="Arial" panose="020B0604020202020204" pitchFamily="34" charset="0"/>
+                <a:cs typeface="Arial" panose="020B0604020202020204" pitchFamily="34" charset="0"/>
+              </a:rPr>
+              <a:t> </a:t>
+            </a:r>
+            <a:r>
+              <a:rPr lang="en-US" sz="2000" dirty="0" err="1">
+                <a:solidFill>
+                  <a:srgbClr val="17242B"/>
+                </a:solidFill>
+                <a:latin typeface="Arial" panose="020B0604020202020204" pitchFamily="34" charset="0"/>
+                <a:cs typeface="Arial" panose="020B0604020202020204" pitchFamily="34" charset="0"/>
+              </a:rPr>
+              <a:t>và</a:t>
+            </a:r>
+            <a:r>
+              <a:rPr lang="en-US" sz="2000" dirty="0">
+                <a:solidFill>
+                  <a:srgbClr val="17242B"/>
+                </a:solidFill>
+                <a:latin typeface="Arial" panose="020B0604020202020204" pitchFamily="34" charset="0"/>
+                <a:cs typeface="Arial" panose="020B0604020202020204" pitchFamily="34" charset="0"/>
+              </a:rPr>
+              <a:t> </a:t>
+            </a:r>
+            <a:r>
+              <a:rPr lang="en-US" sz="2000" dirty="0" err="1">
+                <a:solidFill>
+                  <a:srgbClr val="17242B"/>
+                </a:solidFill>
+                <a:latin typeface="Arial" panose="020B0604020202020204" pitchFamily="34" charset="0"/>
+                <a:cs typeface="Arial" panose="020B0604020202020204" pitchFamily="34" charset="0"/>
+              </a:rPr>
+              <a:t>tuyệt</a:t>
+            </a:r>
+            <a:r>
+              <a:rPr lang="en-US" sz="2000" dirty="0">
+                <a:solidFill>
+                  <a:srgbClr val="17242B"/>
+                </a:solidFill>
+                <a:latin typeface="Arial" panose="020B0604020202020204" pitchFamily="34" charset="0"/>
+                <a:cs typeface="Arial" panose="020B0604020202020204" pitchFamily="34" charset="0"/>
+              </a:rPr>
+              <a:t> </a:t>
+            </a:r>
+            <a:r>
+              <a:rPr lang="en-US" sz="2000" dirty="0" err="1">
+                <a:solidFill>
+                  <a:srgbClr val="17242B"/>
+                </a:solidFill>
+                <a:latin typeface="Arial" panose="020B0604020202020204" pitchFamily="34" charset="0"/>
+                <a:cs typeface="Arial" panose="020B0604020202020204" pitchFamily="34" charset="0"/>
+              </a:rPr>
+              <a:t>đối</a:t>
+            </a:r>
+            <a:r>
+              <a:rPr lang="en-US" sz="2000" dirty="0">
+                <a:solidFill>
+                  <a:srgbClr val="17242B"/>
+                </a:solidFill>
+                <a:latin typeface="Arial" panose="020B0604020202020204" pitchFamily="34" charset="0"/>
+                <a:cs typeface="Arial" panose="020B0604020202020204" pitchFamily="34" charset="0"/>
+              </a:rPr>
+              <a:t>.</a:t>
+            </a:r>
+          </a:p>
+          <a:p>
+            <a:pPr marL="457200" indent="-457200">
+              <a:lnSpc>
+                <a:spcPct val="200000"/>
+              </a:lnSpc>
+              <a:buFont typeface="+mj-lt"/>
+              <a:buAutoNum type="arabicPeriod"/>
+            </a:pPr>
+            <a:r>
+              <a:rPr lang="en-US" sz="2000" dirty="0" err="1">
+                <a:solidFill>
+                  <a:srgbClr val="17242B"/>
+                </a:solidFill>
+                <a:latin typeface="Arial" panose="020B0604020202020204" pitchFamily="34" charset="0"/>
+                <a:cs typeface="Arial" panose="020B0604020202020204" pitchFamily="34" charset="0"/>
+              </a:rPr>
+              <a:t>Có</a:t>
+            </a:r>
+            <a:r>
+              <a:rPr lang="en-US" sz="2000" dirty="0">
+                <a:solidFill>
+                  <a:srgbClr val="17242B"/>
+                </a:solidFill>
+                <a:latin typeface="Arial" panose="020B0604020202020204" pitchFamily="34" charset="0"/>
+                <a:cs typeface="Arial" panose="020B0604020202020204" pitchFamily="34" charset="0"/>
+              </a:rPr>
+              <a:t> bao </a:t>
+            </a:r>
+            <a:r>
+              <a:rPr lang="en-US" sz="2000" dirty="0" err="1">
+                <a:solidFill>
+                  <a:srgbClr val="17242B"/>
+                </a:solidFill>
+                <a:latin typeface="Arial" panose="020B0604020202020204" pitchFamily="34" charset="0"/>
+                <a:cs typeface="Arial" panose="020B0604020202020204" pitchFamily="34" charset="0"/>
+              </a:rPr>
+              <a:t>nhiêu</a:t>
+            </a:r>
+            <a:r>
+              <a:rPr lang="en-US" sz="2000" dirty="0">
+                <a:solidFill>
+                  <a:srgbClr val="17242B"/>
+                </a:solidFill>
+                <a:latin typeface="Arial" panose="020B0604020202020204" pitchFamily="34" charset="0"/>
+                <a:cs typeface="Arial" panose="020B0604020202020204" pitchFamily="34" charset="0"/>
+              </a:rPr>
+              <a:t> </a:t>
+            </a:r>
+            <a:r>
+              <a:rPr lang="en-US" sz="2000" dirty="0" err="1">
+                <a:solidFill>
+                  <a:srgbClr val="17242B"/>
+                </a:solidFill>
+                <a:latin typeface="Arial" panose="020B0604020202020204" pitchFamily="34" charset="0"/>
+                <a:cs typeface="Arial" panose="020B0604020202020204" pitchFamily="34" charset="0"/>
+              </a:rPr>
+              <a:t>trình</a:t>
+            </a:r>
+            <a:r>
+              <a:rPr lang="en-US" sz="2000" dirty="0">
+                <a:solidFill>
+                  <a:srgbClr val="17242B"/>
+                </a:solidFill>
+                <a:latin typeface="Arial" panose="020B0604020202020204" pitchFamily="34" charset="0"/>
+                <a:cs typeface="Arial" panose="020B0604020202020204" pitchFamily="34" charset="0"/>
+              </a:rPr>
+              <a:t> </a:t>
+            </a:r>
+            <a:r>
+              <a:rPr lang="en-US" sz="2000" dirty="0" err="1">
+                <a:solidFill>
+                  <a:srgbClr val="17242B"/>
+                </a:solidFill>
+                <a:latin typeface="Arial" panose="020B0604020202020204" pitchFamily="34" charset="0"/>
+                <a:cs typeface="Arial" panose="020B0604020202020204" pitchFamily="34" charset="0"/>
+              </a:rPr>
+              <a:t>tự</a:t>
+            </a:r>
+            <a:r>
+              <a:rPr lang="en-US" sz="2000" dirty="0">
+                <a:solidFill>
+                  <a:srgbClr val="17242B"/>
+                </a:solidFill>
+                <a:latin typeface="Arial" panose="020B0604020202020204" pitchFamily="34" charset="0"/>
+                <a:cs typeface="Arial" panose="020B0604020202020204" pitchFamily="34" charset="0"/>
+              </a:rPr>
+              <a:t> </a:t>
+            </a:r>
+            <a:r>
+              <a:rPr lang="en-US" sz="2000" dirty="0" err="1">
+                <a:solidFill>
+                  <a:srgbClr val="17242B"/>
+                </a:solidFill>
+                <a:latin typeface="Arial" panose="020B0604020202020204" pitchFamily="34" charset="0"/>
+                <a:cs typeface="Arial" panose="020B0604020202020204" pitchFamily="34" charset="0"/>
+              </a:rPr>
+              <a:t>trong</a:t>
+            </a:r>
+            <a:r>
+              <a:rPr lang="en-US" sz="2000" dirty="0">
+                <a:solidFill>
+                  <a:srgbClr val="17242B"/>
+                </a:solidFill>
+                <a:latin typeface="Arial" panose="020B0604020202020204" pitchFamily="34" charset="0"/>
+                <a:cs typeface="Arial" panose="020B0604020202020204" pitchFamily="34" charset="0"/>
+              </a:rPr>
+              <a:t> file </a:t>
+            </a:r>
+            <a:r>
+              <a:rPr lang="en-US" sz="2000" dirty="0" err="1">
+                <a:solidFill>
+                  <a:srgbClr val="17242B"/>
+                </a:solidFill>
+                <a:latin typeface="Arial" panose="020B0604020202020204" pitchFamily="34" charset="0"/>
+                <a:cs typeface="Arial" panose="020B0604020202020204" pitchFamily="34" charset="0"/>
+              </a:rPr>
+              <a:t>fastq</a:t>
+            </a:r>
+            <a:r>
+              <a:rPr lang="en-US" sz="2000" dirty="0">
+                <a:solidFill>
+                  <a:srgbClr val="17242B"/>
+                </a:solidFill>
+                <a:latin typeface="Arial" panose="020B0604020202020204" pitchFamily="34" charset="0"/>
+                <a:cs typeface="Arial" panose="020B0604020202020204" pitchFamily="34" charset="0"/>
+              </a:rPr>
+              <a:t> </a:t>
+            </a:r>
+            <a:r>
+              <a:rPr lang="en-US" sz="2000" dirty="0" err="1">
+                <a:solidFill>
+                  <a:srgbClr val="17242B"/>
+                </a:solidFill>
+                <a:latin typeface="Arial" panose="020B0604020202020204" pitchFamily="34" charset="0"/>
+                <a:cs typeface="Arial" panose="020B0604020202020204" pitchFamily="34" charset="0"/>
+              </a:rPr>
+              <a:t>vừa</a:t>
+            </a:r>
+            <a:r>
+              <a:rPr lang="en-US" sz="2000" dirty="0">
+                <a:solidFill>
+                  <a:srgbClr val="17242B"/>
+                </a:solidFill>
+                <a:latin typeface="Arial" panose="020B0604020202020204" pitchFamily="34" charset="0"/>
+                <a:cs typeface="Arial" panose="020B0604020202020204" pitchFamily="34" charset="0"/>
+              </a:rPr>
+              <a:t> </a:t>
+            </a:r>
+            <a:r>
+              <a:rPr lang="en-US" sz="2000" dirty="0" err="1">
+                <a:solidFill>
+                  <a:srgbClr val="17242B"/>
+                </a:solidFill>
+                <a:latin typeface="Arial" panose="020B0604020202020204" pitchFamily="34" charset="0"/>
+                <a:cs typeface="Arial" panose="020B0604020202020204" pitchFamily="34" charset="0"/>
+              </a:rPr>
+              <a:t>tạo</a:t>
+            </a:r>
+            <a:r>
+              <a:rPr lang="en-US" sz="2000" dirty="0">
+                <a:solidFill>
+                  <a:srgbClr val="17242B"/>
+                </a:solidFill>
+                <a:latin typeface="Arial" panose="020B0604020202020204" pitchFamily="34" charset="0"/>
+                <a:cs typeface="Arial" panose="020B0604020202020204" pitchFamily="34" charset="0"/>
+              </a:rPr>
+              <a:t> </a:t>
+            </a:r>
+            <a:r>
+              <a:rPr lang="en-US" sz="2000" dirty="0" err="1">
+                <a:solidFill>
+                  <a:srgbClr val="17242B"/>
+                </a:solidFill>
+                <a:latin typeface="Arial" panose="020B0604020202020204" pitchFamily="34" charset="0"/>
+                <a:cs typeface="Arial" panose="020B0604020202020204" pitchFamily="34" charset="0"/>
+              </a:rPr>
+              <a:t>cho</a:t>
+            </a:r>
+            <a:r>
+              <a:rPr lang="en-US" sz="2000" dirty="0">
+                <a:solidFill>
+                  <a:srgbClr val="17242B"/>
+                </a:solidFill>
+                <a:latin typeface="Arial" panose="020B0604020202020204" pitchFamily="34" charset="0"/>
+                <a:cs typeface="Arial" panose="020B0604020202020204" pitchFamily="34" charset="0"/>
+              </a:rPr>
+              <a:t> chr20: </a:t>
+            </a:r>
+            <a:r>
+              <a:rPr lang="en-US" sz="2000" dirty="0">
+                <a:solidFill>
+                  <a:srgbClr val="17242B"/>
+                </a:solidFill>
+                <a:latin typeface="Arial" panose="020B0604020202020204" pitchFamily="34" charset="0"/>
+                <a:ea typeface="Courier New"/>
+                <a:cs typeface="Arial" panose="020B0604020202020204" pitchFamily="34" charset="0"/>
+              </a:rPr>
+              <a:t>data/</a:t>
+            </a:r>
+            <a:r>
+              <a:rPr lang="en-US" sz="2000" dirty="0" err="1">
+                <a:solidFill>
+                  <a:srgbClr val="17242B"/>
+                </a:solidFill>
+                <a:latin typeface="Arial" panose="020B0604020202020204" pitchFamily="34" charset="0"/>
+                <a:ea typeface="Courier New"/>
+                <a:cs typeface="Arial" panose="020B0604020202020204" pitchFamily="34" charset="0"/>
+              </a:rPr>
+              <a:t>fastq</a:t>
+            </a:r>
+            <a:r>
+              <a:rPr lang="en-US" sz="2000" dirty="0">
+                <a:solidFill>
+                  <a:srgbClr val="17242B"/>
+                </a:solidFill>
+                <a:latin typeface="Arial" panose="020B0604020202020204" pitchFamily="34" charset="0"/>
+                <a:ea typeface="Courier New"/>
+                <a:cs typeface="Arial" panose="020B0604020202020204" pitchFamily="34" charset="0"/>
+              </a:rPr>
+              <a:t>/HG002.chr20.fastq.gz</a:t>
+            </a:r>
+            <a:endParaRPr lang="en-US" sz="2000" dirty="0">
+              <a:latin typeface="Arial" panose="020B0604020202020204" pitchFamily="34" charset="0"/>
+              <a:cs typeface="Arial" panose="020B0604020202020204" pitchFamily="34" charset="0"/>
+            </a:endParaRPr>
           </a:p>
         </p:txBody>
       </p:sp>
